--- a/bench/markhand_web/soak/fixtures/soak-pptx.pptx
+++ b/bench/markhand_web/soak/fixtures/soak-pptx.pptx
@@ -1,4 +1,40 @@
 
-<file path=markhand/soak-pptx.txt>markhand soak pptx fixture
+<file path=ppt/presentation.xml><?xml version="1.0" encoding="utf-8"?>
+<p:presentation xmlns:a="http://schemas.openxmlformats.org/drawingml/2006/main" xmlns:r="http://schemas.openxmlformats.org/officeDocument/2006/relationships" xmlns:p="http://schemas.openxmlformats.org/presentationml/2006/main">
+  <p:sldIdLst>
+    <p:sldId id="256" r:id="rId1"/>
+  </p:sldIdLst>
+</p:presentation>
+</file>
 
+<file path=ppt/slides/slide1.xml><?xml version="1.0" encoding="utf-8"?>
+<p:sld xmlns:a="http://schemas.openxmlformats.org/drawingml/2006/main" xmlns:r="http://schemas.openxmlformats.org/officeDocument/2006/relationships" xmlns:p="http://schemas.openxmlformats.org/presentationml/2006/main">
+  <p:cSld>
+    <p:spTree>
+      <p:nvGrpSpPr>
+        <p:cNvPr id="1" name=""/>
+        <p:cNvGrpSpPr/>
+        <p:nvPr/>
+      </p:nvGrpSpPr>
+      <p:grpSpPr/>
+      <p:sp>
+        <p:nvSpPr>
+          <p:cNvPr id="2" name="Title"/>
+          <p:cNvSpPr/>
+          <p:nvPr/>
+        </p:nvSpPr>
+        <p:spPr/>
+        <p:txBody>
+          <a:bodyPr/>
+          <a:lstStyle/>
+          <a:p>
+            <a:r>
+              <a:t>SOAKPPTX15</a:t>
+            </a:r>
+          </a:p>
+        </p:txBody>
+      </p:sp>
+    </p:spTree>
+  </p:cSld>
+</p:sld>
 </file>